--- a/presentation/advisor-presentation.pptx
+++ b/presentation/advisor-presentation.pptx
@@ -12333,7 +12333,7 @@
               </a:defRPr>
             </a:pPr>
             <a:r>
-              <a:t>[SVG 图表]  SVG流程图 — 黑滑石原矿→D1传统煅烧/D2 5G微波陶瓷/D3 N₂碳石墨烯(★初阶旗帜)/D4抗菌岩板/D9酸浸分离</a:t>
+              <a:t>[SVG 图表]  SVG流程图 — 黑滑石原矿→D1传统煅烧/D2 5G微波陶瓷/D3 N₂碳石墨烯(初阶旗帜)/D4抗菌岩板/D9酸浸分离</a:t>
             </a:r>
           </a:p>
         </p:txBody>
